--- a/dataset/guides_final/SYS/manual/IT-SYS-003-M_사내 시스템 장애 신고·이관 처리 매뉴얼.pptx
+++ b/dataset/guides_final/SYS/manual/IT-SYS-003-M_사내 시스템 장애 신고·이관 처리 매뉴얼.pptx
@@ -26134,7 +26134,7 @@
                 <a:ea typeface="Malgun Gothic"/>
                 <a:cs typeface="Malgun Gothic"/>
               </a:rPr>
-              <a:t>티켓: 담당자 조치가 필요한 건. 담당팀에 배정하고 상태를 RDY → IP → FIN → CLS 으로 관리한다.</a:t>
+              <a:t>티켓: 담당자 조치가 필요한 건. 담당팀에 배정하고 상태를 RDY → WIP → FIN → CLS 으로 관리한다.</a:t>
             </a:r>
           </a:p>
         </p:txBody>

--- a/dataset/guides_final/SYS/manual/IT-SYS-003-M_사내 시스템 장애 신고·이관 처리 매뉴얼.pptx
+++ b/dataset/guides_final/SYS/manual/IT-SYS-003-M_사내 시스템 장애 신고·이관 처리 매뉴얼.pptx
@@ -3236,7 +3236,7 @@
                 <a:ea typeface="Malgun Gothic"/>
                 <a:cs typeface="Malgun Gothic"/>
               </a:rPr>
-              <a:t>한화시스템 ICT IT 담당자 매뉴얼 · 사내 시스템</a:t>
+              <a:t>가상 ICT 기업 IT 담당자 매뉴얼 · 사내 시스템</a:t>
             </a:r>
           </a:p>
         </p:txBody>
@@ -3515,7 +3515,7 @@
                 <a:ea typeface="Malgun Gothic"/>
                 <a:cs typeface="Malgun Gothic"/>
               </a:rPr>
-              <a:t>© HANWHA SYSTEMS ICT · IT-SYS-003-M · 사내 제한</a:t>
+              <a:t>© 가상 ICT 기업 · IT-SYS-003-M · 사내 제한</a:t>
             </a:r>
           </a:p>
         </p:txBody>
@@ -4534,7 +4534,7 @@
                 <a:ea typeface="Malgun Gothic"/>
                 <a:cs typeface="Malgun Gothic"/>
               </a:rPr>
-              <a:t>© HANWHA SYSTEMS ICT · IT-SYS-003-M · 사내 제한</a:t>
+              <a:t>© 가상 ICT 기업 · IT-SYS-003-M · 사내 제한</a:t>
             </a:r>
           </a:p>
         </p:txBody>
@@ -6884,7 +6884,7 @@
                 <a:ea typeface="Malgun Gothic"/>
                 <a:cs typeface="Malgun Gothic"/>
               </a:rPr>
-              <a:t>© HANWHA SYSTEMS ICT · IT-SYS-003-M · 사내 제한</a:t>
+              <a:t>© 가상 ICT 기업 · IT-SYS-003-M · 사내 제한</a:t>
             </a:r>
           </a:p>
         </p:txBody>
@@ -8091,7 +8091,7 @@
                 <a:ea typeface="Malgun Gothic"/>
                 <a:cs typeface="Malgun Gothic"/>
               </a:rPr>
-              <a:t>© HANWHA SYSTEMS ICT · IT-SYS-003-M · 사내 제한</a:t>
+              <a:t>© 가상 ICT 기업 · IT-SYS-003-M · 사내 제한</a:t>
             </a:r>
           </a:p>
         </p:txBody>
@@ -10441,7 +10441,7 @@
                 <a:ea typeface="Malgun Gothic"/>
                 <a:cs typeface="Malgun Gothic"/>
               </a:rPr>
-              <a:t>© HANWHA SYSTEMS ICT · IT-SYS-003-M · 사내 제한</a:t>
+              <a:t>© 가상 ICT 기업 · IT-SYS-003-M · 사내 제한</a:t>
             </a:r>
           </a:p>
         </p:txBody>
@@ -11460,7 +11460,7 @@
                 <a:ea typeface="Malgun Gothic"/>
                 <a:cs typeface="Malgun Gothic"/>
               </a:rPr>
-              <a:t>© HANWHA SYSTEMS ICT · IT-SYS-003-M · 사내 제한</a:t>
+              <a:t>© 가상 ICT 기업 · IT-SYS-003-M · 사내 제한</a:t>
             </a:r>
           </a:p>
         </p:txBody>
@@ -13716,7 +13716,7 @@
                 <a:ea typeface="Malgun Gothic"/>
                 <a:cs typeface="Malgun Gothic"/>
               </a:rPr>
-              <a:t>© HANWHA SYSTEMS ICT · IT-SYS-003-M · 사내 제한</a:t>
+              <a:t>© 가상 ICT 기업 · IT-SYS-003-M · 사내 제한</a:t>
             </a:r>
           </a:p>
         </p:txBody>
@@ -14735,7 +14735,7 @@
                 <a:ea typeface="Malgun Gothic"/>
                 <a:cs typeface="Malgun Gothic"/>
               </a:rPr>
-              <a:t>© HANWHA SYSTEMS ICT · IT-SYS-003-M · 사내 제한</a:t>
+              <a:t>© 가상 ICT 기업 · IT-SYS-003-M · 사내 제한</a:t>
             </a:r>
           </a:p>
         </p:txBody>
@@ -14983,7 +14983,7 @@
                 <a:ea typeface="Malgun Gothic"/>
                 <a:cs typeface="Malgun Gothic"/>
               </a:rPr>
-              <a:t>© HANWHA SYSTEMS ICT · IT-SYS-003-M · 사내 제한</a:t>
+              <a:t>© 가상 ICT 기업 · IT-SYS-003-M · 사내 제한</a:t>
             </a:r>
           </a:p>
         </p:txBody>
@@ -15690,7 +15690,7 @@
                 <a:ea typeface="Malgun Gothic"/>
                 <a:cs typeface="Malgun Gothic"/>
               </a:rPr>
-              <a:t>© HANWHA SYSTEMS ICT · IT-SYS-003-M · 사내 제한</a:t>
+              <a:t>© 가상 ICT 기업 · IT-SYS-003-M · 사내 제한</a:t>
             </a:r>
           </a:p>
         </p:txBody>
@@ -15938,7 +15938,7 @@
                 <a:ea typeface="Malgun Gothic"/>
                 <a:cs typeface="Malgun Gothic"/>
               </a:rPr>
-              <a:t>© HANWHA SYSTEMS ICT · IT-SYS-003-M · 사내 제한</a:t>
+              <a:t>© 가상 ICT 기업 · IT-SYS-003-M · 사내 제한</a:t>
             </a:r>
           </a:p>
         </p:txBody>
@@ -17581,7 +17581,7 @@
                 <a:ea typeface="Malgun Gothic"/>
                 <a:cs typeface="Malgun Gothic"/>
               </a:rPr>
-              <a:t>© HANWHA SYSTEMS ICT · IT-SYS-003-M · 사내 제한</a:t>
+              <a:t>© 가상 ICT 기업 · IT-SYS-003-M · 사내 제한</a:t>
             </a:r>
           </a:p>
         </p:txBody>
@@ -18609,7 +18609,7 @@
                 <a:ea typeface="Malgun Gothic"/>
                 <a:cs typeface="Malgun Gothic"/>
               </a:rPr>
-              <a:t>© HANWHA SYSTEMS ICT · IT-SYS-003-M · 사내 제한</a:t>
+              <a:t>© 가상 ICT 기업 · IT-SYS-003-M · 사내 제한</a:t>
             </a:r>
           </a:p>
         </p:txBody>
@@ -18857,7 +18857,7 @@
                 <a:ea typeface="Malgun Gothic"/>
                 <a:cs typeface="Malgun Gothic"/>
               </a:rPr>
-              <a:t>© HANWHA SYSTEMS ICT · IT-SYS-003-M · 사내 제한</a:t>
+              <a:t>© 가상 ICT 기업 · IT-SYS-003-M · 사내 제한</a:t>
             </a:r>
           </a:p>
         </p:txBody>
@@ -19661,7 +19661,7 @@
                 <a:ea typeface="Malgun Gothic"/>
                 <a:cs typeface="Malgun Gothic"/>
               </a:rPr>
-              <a:t>© HANWHA SYSTEMS ICT · IT-SYS-003-M · 사내 제한</a:t>
+              <a:t>© 가상 ICT 기업 · IT-SYS-003-M · 사내 제한</a:t>
             </a:r>
           </a:p>
         </p:txBody>
@@ -20638,7 +20638,7 @@
                 <a:ea typeface="Malgun Gothic"/>
                 <a:cs typeface="Malgun Gothic"/>
               </a:rPr>
-              <a:t>© HANWHA SYSTEMS ICT · IT-SYS-003-M · 사내 제한</a:t>
+              <a:t>© 가상 ICT 기업 · IT-SYS-003-M · 사내 제한</a:t>
             </a:r>
           </a:p>
         </p:txBody>
@@ -21784,7 +21784,7 @@
                 <a:ea typeface="Malgun Gothic"/>
                 <a:cs typeface="Malgun Gothic"/>
               </a:rPr>
-              <a:t>© HANWHA SYSTEMS ICT · IT-SYS-003-M · 사내 제한</a:t>
+              <a:t>© 가상 ICT 기업 · IT-SYS-003-M · 사내 제한</a:t>
             </a:r>
           </a:p>
         </p:txBody>
@@ -22032,7 +22032,7 @@
                 <a:ea typeface="Malgun Gothic"/>
                 <a:cs typeface="Malgun Gothic"/>
               </a:rPr>
-              <a:t>© HANWHA SYSTEMS ICT · IT-SYS-003-M · 사내 제한</a:t>
+              <a:t>© 가상 ICT 기업 · IT-SYS-003-M · 사내 제한</a:t>
             </a:r>
           </a:p>
         </p:txBody>
@@ -23402,7 +23402,7 @@
                 <a:ea typeface="Malgun Gothic"/>
                 <a:cs typeface="Malgun Gothic"/>
               </a:rPr>
-              <a:t>© HANWHA SYSTEMS ICT · IT-SYS-003-M · 사내 제한</a:t>
+              <a:t>© 가상 ICT 기업 · IT-SYS-003-M · 사내 제한</a:t>
             </a:r>
           </a:p>
         </p:txBody>
@@ -23650,7 +23650,7 @@
                 <a:ea typeface="Malgun Gothic"/>
                 <a:cs typeface="Malgun Gothic"/>
               </a:rPr>
-              <a:t>© HANWHA SYSTEMS ICT · IT-SYS-003-M · 사내 제한</a:t>
+              <a:t>© 가상 ICT 기업 · IT-SYS-003-M · 사내 제한</a:t>
             </a:r>
           </a:p>
         </p:txBody>
@@ -26510,7 +26510,7 @@
                 <a:ea typeface="Malgun Gothic"/>
                 <a:cs typeface="Malgun Gothic"/>
               </a:rPr>
-              <a:t>© HANWHA SYSTEMS ICT · IT-SYS-003-M · 사내 제한</a:t>
+              <a:t>© 가상 ICT 기업 · IT-SYS-003-M · 사내 제한</a:t>
             </a:r>
           </a:p>
         </p:txBody>
@@ -26758,7 +26758,7 @@
                 <a:ea typeface="Malgun Gothic"/>
                 <a:cs typeface="Malgun Gothic"/>
               </a:rPr>
-              <a:t>© HANWHA SYSTEMS ICT · IT-SYS-003-M · 사내 제한</a:t>
+              <a:t>© 가상 ICT 기업 · IT-SYS-003-M · 사내 제한</a:t>
             </a:r>
           </a:p>
         </p:txBody>
@@ -29108,7 +29108,7 @@
                 <a:ea typeface="Malgun Gothic"/>
                 <a:cs typeface="Malgun Gothic"/>
               </a:rPr>
-              <a:t>© HANWHA SYSTEMS ICT · IT-SYS-003-M · 사내 제한</a:t>
+              <a:t>© 가상 ICT 기업 · IT-SYS-003-M · 사내 제한</a:t>
             </a:r>
           </a:p>
         </p:txBody>
